--- a/Competition/Summer_2024/Presentation/CCI_Presentation_equipe3.pptx
+++ b/Competition/Summer_2024/Presentation/CCI_Presentation_equipe3.pptx
@@ -1230,7 +1230,7 @@
               </a:spcAft>
               <a:buNone/>
             </a:pPr>
-            <a:endParaRPr/>
+            <a:endParaRPr dirty="0"/>
           </a:p>
         </p:txBody>
       </p:sp>
@@ -5340,8 +5340,8 @@
         </p:blipFill>
         <p:spPr>
           <a:xfrm>
-            <a:off x="5174591" y="412104"/>
-            <a:ext cx="3107134" cy="1969146"/>
+            <a:off x="5439643" y="412104"/>
+            <a:ext cx="2577382" cy="1633416"/>
           </a:xfrm>
           <a:prstGeom prst="rect">
             <a:avLst/>
@@ -5350,7 +5350,7 @@
       </p:pic>
       <p:pic>
         <p:nvPicPr>
-          <p:cNvPr id="14" name="Image 13" descr="Une image contenant souris d’ordinateur, Appareil de saisie, périphérique, Appareil électronique&#10;&#10;Description générée automatiquement">
+          <p:cNvPr id="14" name="Image 13">
             <a:extLst>
               <a:ext uri="{FF2B5EF4-FFF2-40B4-BE49-F238E27FC236}">
                 <a16:creationId xmlns:a16="http://schemas.microsoft.com/office/drawing/2014/main" id="{B3504577-13F0-EFDD-3C43-03BB9912CF9E}"/>
@@ -5364,20 +5364,65 @@
         </p:nvPicPr>
         <p:blipFill>
           <a:blip r:embed="rId4"/>
-          <a:stretch>
-            <a:fillRect/>
-          </a:stretch>
+          <a:srcRect/>
+          <a:stretch/>
         </p:blipFill>
         <p:spPr>
           <a:xfrm>
-            <a:off x="5174591" y="2506104"/>
-            <a:ext cx="3084728" cy="2313546"/>
+            <a:off x="5968638" y="2798626"/>
+            <a:ext cx="1519036" cy="1932770"/>
           </a:xfrm>
           <a:prstGeom prst="rect">
             <a:avLst/>
           </a:prstGeom>
         </p:spPr>
       </p:pic>
+      <p:sp>
+        <p:nvSpPr>
+          <p:cNvPr id="4" name="Plus Sign 3">
+            <a:extLst>
+              <a:ext uri="{FF2B5EF4-FFF2-40B4-BE49-F238E27FC236}">
+                <a16:creationId xmlns:a16="http://schemas.microsoft.com/office/drawing/2014/main" id="{B2ACBBA6-A1E3-5A5C-CEF6-2E905F27DCA8}"/>
+              </a:ext>
+            </a:extLst>
+          </p:cNvPr>
+          <p:cNvSpPr/>
+          <p:nvPr/>
+        </p:nvSpPr>
+        <p:spPr>
+          <a:xfrm>
+            <a:off x="6426821" y="2113841"/>
+            <a:ext cx="602673" cy="664917"/>
+          </a:xfrm>
+          <a:prstGeom prst="mathPlus">
+            <a:avLst/>
+          </a:prstGeom>
+        </p:spPr>
+        <p:style>
+          <a:lnRef idx="2">
+            <a:schemeClr val="accent1">
+              <a:shade val="15000"/>
+            </a:schemeClr>
+          </a:lnRef>
+          <a:fillRef idx="1">
+            <a:schemeClr val="accent1"/>
+          </a:fillRef>
+          <a:effectRef idx="0">
+            <a:schemeClr val="accent1"/>
+          </a:effectRef>
+          <a:fontRef idx="minor">
+            <a:schemeClr val="lt1"/>
+          </a:fontRef>
+        </p:style>
+        <p:txBody>
+          <a:bodyPr rtlCol="0" anchor="ctr"/>
+          <a:lstStyle/>
+          <a:p>
+            <a:pPr algn="ctr"/>
+            <a:endParaRPr lang="en-CA"/>
+          </a:p>
+        </p:txBody>
+      </p:sp>
     </p:spTree>
     <p:extLst>
       <p:ext uri="{BB962C8B-B14F-4D97-AF65-F5344CB8AC3E}">
@@ -6519,7 +6564,7 @@
           <a:p>
             <a:r>
               <a:rPr lang="fr-CA" dirty="0"/>
-              <a:t>PCB 4 couches (Antenne)</a:t>
+              <a:t>PCB 4 couches </a:t>
             </a:r>
           </a:p>
           <a:p>
@@ -6529,6 +6574,15 @@
             <a:r>
               <a:rPr lang="fr-CA" dirty="0"/>
               <a:t>0603 (Presque tout)</a:t>
+            </a:r>
+          </a:p>
+          <a:p>
+            <a:endParaRPr lang="fr-CA" dirty="0"/>
+          </a:p>
+          <a:p>
+            <a:r>
+              <a:rPr lang="fr-CA" dirty="0"/>
+              <a:t>Aucunes erreurs selon KICAD</a:t>
             </a:r>
           </a:p>
           <a:p>
@@ -7290,21 +7344,16 @@
             <a:pPr lvl="1"/>
             <a:r>
               <a:rPr lang="fr-CA" dirty="0"/>
-              <a:t>… </a:t>
+              <a:t>… Something </a:t>
             </a:r>
             <a:r>
               <a:rPr lang="fr-CA" dirty="0" err="1"/>
-              <a:t>idk</a:t>
+              <a:t>Something</a:t>
             </a:r>
             <a:r>
               <a:rPr lang="fr-CA" dirty="0"/>
-              <a:t> </a:t>
+              <a:t> dans la documentation</a:t>
             </a:r>
-            <a:r>
-              <a:rPr lang="fr-CA" dirty="0" err="1"/>
-              <a:t>what</a:t>
-            </a:r>
-            <a:endParaRPr lang="fr-CA" dirty="0"/>
           </a:p>
           <a:p>
             <a:endParaRPr lang="fr-CA" dirty="0"/>
@@ -8050,8 +8099,8 @@
         </p:nvSpPr>
         <p:spPr>
           <a:xfrm>
-            <a:off x="288683" y="1061515"/>
-            <a:ext cx="3847200" cy="2379900"/>
+            <a:off x="288683" y="1061514"/>
+            <a:ext cx="3847200" cy="2630721"/>
           </a:xfrm>
         </p:spPr>
         <p:txBody>
@@ -8072,16 +8121,11 @@
             </a:r>
             <a:r>
               <a:rPr lang="fr-CA" b="1" dirty="0"/>
-              <a:t>21.28$ (pas sur que </a:t>
+              <a:t>21.28$ (++)</a:t>
             </a:r>
-            <a:r>
-              <a:rPr lang="fr-CA" b="1" dirty="0" err="1"/>
-              <a:t>cest</a:t>
-            </a:r>
-            <a:r>
-              <a:rPr lang="fr-CA" b="1" dirty="0"/>
-              <a:t> le bon prix)</a:t>
-            </a:r>
+          </a:p>
+          <a:p>
+            <a:endParaRPr lang="fr-CA" b="1" dirty="0"/>
           </a:p>
           <a:p>
             <a:pPr marL="114300" indent="0">
@@ -8096,7 +8140,7 @@
             </a:r>
             <a:r>
               <a:rPr lang="fr-CA" b="1" dirty="0"/>
-              <a:t>???</a:t>
+              <a:t>37$ (Trop cher)</a:t>
             </a:r>
           </a:p>
           <a:p>
@@ -8122,15 +8166,7 @@
             <a:pPr lvl="1"/>
             <a:r>
               <a:rPr lang="fr-CA" dirty="0"/>
-              <a:t>Explication : Certaines pièces </a:t>
-            </a:r>
-            <a:r>
-              <a:rPr lang="fr-CA" dirty="0" err="1"/>
-              <a:t>préfaites</a:t>
-            </a:r>
-            <a:r>
-              <a:rPr lang="fr-CA" dirty="0"/>
-              <a:t> plus dispendieuse.</a:t>
+              <a:t>Explication : Certaines pièces plus dispendieuse. Pourrait être évité</a:t>
             </a:r>
           </a:p>
           <a:p>
@@ -8585,13 +8621,16 @@
           <a:p>
             <a:r>
               <a:rPr lang="fr-CA" dirty="0"/>
-              <a:t>Développement logiciel</a:t>
+              <a:t>Distance</a:t>
             </a:r>
           </a:p>
           <a:p>
             <a:endParaRPr lang="fr-CA" dirty="0"/>
           </a:p>
           <a:p>
+            <a:pPr marL="114300" indent="0">
+              <a:buNone/>
+            </a:pPr>
             <a:endParaRPr lang="fr-CA" dirty="0"/>
           </a:p>
           <a:p>
@@ -9058,16 +9097,23 @@
           <a:p>
             <a:r>
               <a:rPr lang="fr-CA" dirty="0"/>
-              <a:t>Keylogger : Communication </a:t>
+              <a:t>Keylogger : Problème de Communication</a:t>
             </a:r>
+          </a:p>
+          <a:p>
+            <a:pPr marL="114300" indent="0">
+              <a:buNone/>
+            </a:pPr>
+            <a:endParaRPr lang="fr-CA" dirty="0"/>
+          </a:p>
+          <a:p>
+            <a:endParaRPr lang="fr-CA" dirty="0"/>
+          </a:p>
+          <a:p>
             <a:r>
-              <a:rPr lang="fr-CA" dirty="0" err="1"/>
-              <a:t>bi-directionnelle</a:t>
+              <a:rPr lang="fr-CA" dirty="0"/>
+              <a:t>Exécution de Batch files (USB)</a:t>
             </a:r>
-            <a:endParaRPr lang="fr-CA" dirty="0"/>
-          </a:p>
-          <a:p>
-            <a:endParaRPr lang="fr-CA" dirty="0"/>
           </a:p>
           <a:p>
             <a:endParaRPr lang="fr-CA" dirty="0"/>
@@ -9683,6 +9729,23 @@
 </file>
 
 <file path=customXml/item1.xml><?xml version="1.0" encoding="utf-8"?>
+<p:properties xmlns:p="http://schemas.microsoft.com/office/2006/metadata/properties" xmlns:xsi="http://www.w3.org/2001/XMLSchema-instance" xmlns:pc="http://schemas.microsoft.com/office/infopath/2007/PartnerControls">
+  <documentManagement>
+    <_activity xmlns="9efdc635-2d4a-4577-bac5-60b7706b1c8e" xsi:nil="true"/>
+  </documentManagement>
+</p:properties>
+</file>
+
+<file path=customXml/item2.xml><?xml version="1.0" encoding="utf-8"?>
+<?mso-contentType ?>
+<FormTemplates xmlns="http://schemas.microsoft.com/sharepoint/v3/contenttype/forms">
+  <Display>DocumentLibraryForm</Display>
+  <Edit>DocumentLibraryForm</Edit>
+  <New>DocumentLibraryForm</New>
+</FormTemplates>
+</file>
+
+<file path=customXml/item3.xml><?xml version="1.0" encoding="utf-8"?>
 <ct:contentTypeSchema xmlns:ct="http://schemas.microsoft.com/office/2006/metadata/contentType" xmlns:ma="http://schemas.microsoft.com/office/2006/metadata/properties/metaAttributes" ct:_="" ma:_="" ma:contentTypeName="Document" ma:contentTypeID="0x010100107DF5F791B8F54F8042F960B9AF29BA" ma:contentTypeVersion="14" ma:contentTypeDescription="Crée un document." ma:contentTypeScope="" ma:versionID="567c5f3912850af7b17fc17db0e10d44">
   <xsd:schema xmlns:xsd="http://www.w3.org/2001/XMLSchema" xmlns:xs="http://www.w3.org/2001/XMLSchema" xmlns:p="http://schemas.microsoft.com/office/2006/metadata/properties" xmlns:ns3="9efdc635-2d4a-4577-bac5-60b7706b1c8e" xmlns:ns4="88dee0ad-cc88-4212-9928-6393b1d6acf4" targetNamespace="http://schemas.microsoft.com/office/2006/metadata/properties" ma:root="true" ma:fieldsID="e26b59c7bd668267f00a75fa1579996e" ns3:_="" ns4:_="">
     <xsd:import namespace="9efdc635-2d4a-4577-bac5-60b7706b1c8e"/>
@@ -9909,24 +9972,32 @@
 </ct:contentTypeSchema>
 </file>
 
-<file path=customXml/item2.xml><?xml version="1.0" encoding="utf-8"?>
-<?mso-contentType ?>
-<FormTemplates xmlns="http://schemas.microsoft.com/sharepoint/v3/contenttype/forms">
-  <Display>DocumentLibraryForm</Display>
-  <Edit>DocumentLibraryForm</Edit>
-  <New>DocumentLibraryForm</New>
-</FormTemplates>
+<file path=customXml/itemProps1.xml><?xml version="1.0" encoding="utf-8"?>
+<ds:datastoreItem xmlns:ds="http://schemas.openxmlformats.org/officeDocument/2006/customXml" ds:itemID="{A553481A-5BE1-4A6B-A575-431D2746F341}">
+  <ds:schemaRefs>
+    <ds:schemaRef ds:uri="http://schemas.microsoft.com/office/2006/metadata/properties"/>
+    <ds:schemaRef ds:uri="http://schemas.openxmlformats.org/package/2006/metadata/core-properties"/>
+    <ds:schemaRef ds:uri="http://schemas.microsoft.com/office/infopath/2007/PartnerControls"/>
+    <ds:schemaRef ds:uri="88dee0ad-cc88-4212-9928-6393b1d6acf4"/>
+    <ds:schemaRef ds:uri="http://schemas.microsoft.com/office/2006/documentManagement/types"/>
+    <ds:schemaRef ds:uri="http://purl.org/dc/elements/1.1/"/>
+    <ds:schemaRef ds:uri="http://purl.org/dc/dcmitype/"/>
+    <ds:schemaRef ds:uri="9efdc635-2d4a-4577-bac5-60b7706b1c8e"/>
+    <ds:schemaRef ds:uri="http://www.w3.org/XML/1998/namespace"/>
+    <ds:schemaRef ds:uri="http://purl.org/dc/terms/"/>
+  </ds:schemaRefs>
+</ds:datastoreItem>
 </file>
 
-<file path=customXml/item3.xml><?xml version="1.0" encoding="utf-8"?>
-<p:properties xmlns:p="http://schemas.microsoft.com/office/2006/metadata/properties" xmlns:xsi="http://www.w3.org/2001/XMLSchema-instance" xmlns:pc="http://schemas.microsoft.com/office/infopath/2007/PartnerControls">
-  <documentManagement>
-    <_activity xmlns="9efdc635-2d4a-4577-bac5-60b7706b1c8e" xsi:nil="true"/>
-  </documentManagement>
-</p:properties>
+<file path=customXml/itemProps2.xml><?xml version="1.0" encoding="utf-8"?>
+<ds:datastoreItem xmlns:ds="http://schemas.openxmlformats.org/officeDocument/2006/customXml" ds:itemID="{2BE2944A-53C4-495A-8A57-96AA415D3612}">
+  <ds:schemaRefs>
+    <ds:schemaRef ds:uri="http://schemas.microsoft.com/sharepoint/v3/contenttype/forms"/>
+  </ds:schemaRefs>
+</ds:datastoreItem>
 </file>
 
-<file path=customXml/itemProps1.xml><?xml version="1.0" encoding="utf-8"?>
+<file path=customXml/itemProps3.xml><?xml version="1.0" encoding="utf-8"?>
 <ds:datastoreItem xmlns:ds="http://schemas.openxmlformats.org/officeDocument/2006/customXml" ds:itemID="{0746DDD0-95D9-48A3-B842-625AD76EB9EA}">
   <ds:schemaRefs>
     <ds:schemaRef ds:uri="88dee0ad-cc88-4212-9928-6393b1d6acf4"/>
@@ -9943,29 +10014,4 @@
     <ds:schemaRef ds:uri="http://www.w3.org/2001/XMLSchema"/>
   </ds:schemaRefs>
 </ds:datastoreItem>
-</file>
-
-<file path=customXml/itemProps2.xml><?xml version="1.0" encoding="utf-8"?>
-<ds:datastoreItem xmlns:ds="http://schemas.openxmlformats.org/officeDocument/2006/customXml" ds:itemID="{2BE2944A-53C4-495A-8A57-96AA415D3612}">
-  <ds:schemaRefs>
-    <ds:schemaRef ds:uri="http://schemas.microsoft.com/sharepoint/v3/contenttype/forms"/>
-  </ds:schemaRefs>
-</ds:datastoreItem>
-</file>
-
-<file path=customXml/itemProps3.xml><?xml version="1.0" encoding="utf-8"?>
-<ds:datastoreItem xmlns:ds="http://schemas.openxmlformats.org/officeDocument/2006/customXml" ds:itemID="{A553481A-5BE1-4A6B-A575-431D2746F341}">
-  <ds:schemaRefs>
-    <ds:schemaRef ds:uri="http://schemas.microsoft.com/office/2006/metadata/properties"/>
-    <ds:schemaRef ds:uri="http://schemas.openxmlformats.org/package/2006/metadata/core-properties"/>
-    <ds:schemaRef ds:uri="http://schemas.microsoft.com/office/infopath/2007/PartnerControls"/>
-    <ds:schemaRef ds:uri="88dee0ad-cc88-4212-9928-6393b1d6acf4"/>
-    <ds:schemaRef ds:uri="http://schemas.microsoft.com/office/2006/documentManagement/types"/>
-    <ds:schemaRef ds:uri="http://purl.org/dc/elements/1.1/"/>
-    <ds:schemaRef ds:uri="http://purl.org/dc/dcmitype/"/>
-    <ds:schemaRef ds:uri="9efdc635-2d4a-4577-bac5-60b7706b1c8e"/>
-    <ds:schemaRef ds:uri="http://www.w3.org/XML/1998/namespace"/>
-    <ds:schemaRef ds:uri="http://purl.org/dc/terms/"/>
-  </ds:schemaRefs>
-</ds:datastoreItem>
 </file>
--- a/Competition/Summer_2024/Presentation/CCI_Presentation_equipe3.pptx
+++ b/Competition/Summer_2024/Presentation/CCI_Presentation_equipe3.pptx
@@ -9729,23 +9729,6 @@
 </file>
 
 <file path=customXml/item1.xml><?xml version="1.0" encoding="utf-8"?>
-<p:properties xmlns:p="http://schemas.microsoft.com/office/2006/metadata/properties" xmlns:xsi="http://www.w3.org/2001/XMLSchema-instance" xmlns:pc="http://schemas.microsoft.com/office/infopath/2007/PartnerControls">
-  <documentManagement>
-    <_activity xmlns="9efdc635-2d4a-4577-bac5-60b7706b1c8e" xsi:nil="true"/>
-  </documentManagement>
-</p:properties>
-</file>
-
-<file path=customXml/item2.xml><?xml version="1.0" encoding="utf-8"?>
-<?mso-contentType ?>
-<FormTemplates xmlns="http://schemas.microsoft.com/sharepoint/v3/contenttype/forms">
-  <Display>DocumentLibraryForm</Display>
-  <Edit>DocumentLibraryForm</Edit>
-  <New>DocumentLibraryForm</New>
-</FormTemplates>
-</file>
-
-<file path=customXml/item3.xml><?xml version="1.0" encoding="utf-8"?>
 <ct:contentTypeSchema xmlns:ct="http://schemas.microsoft.com/office/2006/metadata/contentType" xmlns:ma="http://schemas.microsoft.com/office/2006/metadata/properties/metaAttributes" ct:_="" ma:_="" ma:contentTypeName="Document" ma:contentTypeID="0x010100107DF5F791B8F54F8042F960B9AF29BA" ma:contentTypeVersion="14" ma:contentTypeDescription="Crée un document." ma:contentTypeScope="" ma:versionID="567c5f3912850af7b17fc17db0e10d44">
   <xsd:schema xmlns:xsd="http://www.w3.org/2001/XMLSchema" xmlns:xs="http://www.w3.org/2001/XMLSchema" xmlns:p="http://schemas.microsoft.com/office/2006/metadata/properties" xmlns:ns3="9efdc635-2d4a-4577-bac5-60b7706b1c8e" xmlns:ns4="88dee0ad-cc88-4212-9928-6393b1d6acf4" targetNamespace="http://schemas.microsoft.com/office/2006/metadata/properties" ma:root="true" ma:fieldsID="e26b59c7bd668267f00a75fa1579996e" ns3:_="" ns4:_="">
     <xsd:import namespace="9efdc635-2d4a-4577-bac5-60b7706b1c8e"/>
@@ -9972,32 +9955,24 @@
 </ct:contentTypeSchema>
 </file>
 
-<file path=customXml/itemProps1.xml><?xml version="1.0" encoding="utf-8"?>
-<ds:datastoreItem xmlns:ds="http://schemas.openxmlformats.org/officeDocument/2006/customXml" ds:itemID="{A553481A-5BE1-4A6B-A575-431D2746F341}">
-  <ds:schemaRefs>
-    <ds:schemaRef ds:uri="http://schemas.microsoft.com/office/2006/metadata/properties"/>
-    <ds:schemaRef ds:uri="http://schemas.openxmlformats.org/package/2006/metadata/core-properties"/>
-    <ds:schemaRef ds:uri="http://schemas.microsoft.com/office/infopath/2007/PartnerControls"/>
-    <ds:schemaRef ds:uri="88dee0ad-cc88-4212-9928-6393b1d6acf4"/>
-    <ds:schemaRef ds:uri="http://schemas.microsoft.com/office/2006/documentManagement/types"/>
-    <ds:schemaRef ds:uri="http://purl.org/dc/elements/1.1/"/>
-    <ds:schemaRef ds:uri="http://purl.org/dc/dcmitype/"/>
-    <ds:schemaRef ds:uri="9efdc635-2d4a-4577-bac5-60b7706b1c8e"/>
-    <ds:schemaRef ds:uri="http://www.w3.org/XML/1998/namespace"/>
-    <ds:schemaRef ds:uri="http://purl.org/dc/terms/"/>
-  </ds:schemaRefs>
-</ds:datastoreItem>
+<file path=customXml/item2.xml><?xml version="1.0" encoding="utf-8"?>
+<?mso-contentType ?>
+<FormTemplates xmlns="http://schemas.microsoft.com/sharepoint/v3/contenttype/forms">
+  <Display>DocumentLibraryForm</Display>
+  <Edit>DocumentLibraryForm</Edit>
+  <New>DocumentLibraryForm</New>
+</FormTemplates>
 </file>
 
-<file path=customXml/itemProps2.xml><?xml version="1.0" encoding="utf-8"?>
-<ds:datastoreItem xmlns:ds="http://schemas.openxmlformats.org/officeDocument/2006/customXml" ds:itemID="{2BE2944A-53C4-495A-8A57-96AA415D3612}">
-  <ds:schemaRefs>
-    <ds:schemaRef ds:uri="http://schemas.microsoft.com/sharepoint/v3/contenttype/forms"/>
-  </ds:schemaRefs>
-</ds:datastoreItem>
+<file path=customXml/item3.xml><?xml version="1.0" encoding="utf-8"?>
+<p:properties xmlns:p="http://schemas.microsoft.com/office/2006/metadata/properties" xmlns:xsi="http://www.w3.org/2001/XMLSchema-instance" xmlns:pc="http://schemas.microsoft.com/office/infopath/2007/PartnerControls">
+  <documentManagement>
+    <_activity xmlns="9efdc635-2d4a-4577-bac5-60b7706b1c8e" xsi:nil="true"/>
+  </documentManagement>
+</p:properties>
 </file>
 
-<file path=customXml/itemProps3.xml><?xml version="1.0" encoding="utf-8"?>
+<file path=customXml/itemProps1.xml><?xml version="1.0" encoding="utf-8"?>
 <ds:datastoreItem xmlns:ds="http://schemas.openxmlformats.org/officeDocument/2006/customXml" ds:itemID="{0746DDD0-95D9-48A3-B842-625AD76EB9EA}">
   <ds:schemaRefs>
     <ds:schemaRef ds:uri="88dee0ad-cc88-4212-9928-6393b1d6acf4"/>
@@ -10014,4 +9989,29 @@
     <ds:schemaRef ds:uri="http://www.w3.org/2001/XMLSchema"/>
   </ds:schemaRefs>
 </ds:datastoreItem>
+</file>
+
+<file path=customXml/itemProps2.xml><?xml version="1.0" encoding="utf-8"?>
+<ds:datastoreItem xmlns:ds="http://schemas.openxmlformats.org/officeDocument/2006/customXml" ds:itemID="{2BE2944A-53C4-495A-8A57-96AA415D3612}">
+  <ds:schemaRefs>
+    <ds:schemaRef ds:uri="http://schemas.microsoft.com/sharepoint/v3/contenttype/forms"/>
+  </ds:schemaRefs>
+</ds:datastoreItem>
+</file>
+
+<file path=customXml/itemProps3.xml><?xml version="1.0" encoding="utf-8"?>
+<ds:datastoreItem xmlns:ds="http://schemas.openxmlformats.org/officeDocument/2006/customXml" ds:itemID="{A553481A-5BE1-4A6B-A575-431D2746F341}">
+  <ds:schemaRefs>
+    <ds:schemaRef ds:uri="http://schemas.microsoft.com/office/2006/metadata/properties"/>
+    <ds:schemaRef ds:uri="http://schemas.openxmlformats.org/package/2006/metadata/core-properties"/>
+    <ds:schemaRef ds:uri="http://schemas.microsoft.com/office/infopath/2007/PartnerControls"/>
+    <ds:schemaRef ds:uri="88dee0ad-cc88-4212-9928-6393b1d6acf4"/>
+    <ds:schemaRef ds:uri="http://schemas.microsoft.com/office/2006/documentManagement/types"/>
+    <ds:schemaRef ds:uri="http://purl.org/dc/elements/1.1/"/>
+    <ds:schemaRef ds:uri="http://purl.org/dc/dcmitype/"/>
+    <ds:schemaRef ds:uri="9efdc635-2d4a-4577-bac5-60b7706b1c8e"/>
+    <ds:schemaRef ds:uri="http://www.w3.org/XML/1998/namespace"/>
+    <ds:schemaRef ds:uri="http://purl.org/dc/terms/"/>
+  </ds:schemaRefs>
+</ds:datastoreItem>
 </file>